--- a/presentation/0811_11_Dilithium.pptx
+++ b/presentation/0811_11_Dilithium.pptx
@@ -249,7 +249,7 @@
           <a:p>
             <a:fld id="{B52B40C2-3351-40A2-B46D-4B4F877A79B2}" type="datetimeFigureOut">
               <a:rPr lang="ko-KR" altLang="en-US" smtClean="0"/>
-              <a:t>2026-08-11</a:t>
+              <a:t>2026-08-23</a:t>
             </a:fld>
             <a:endParaRPr lang="ko-KR" altLang="en-US" dirty="0"/>
           </a:p>
@@ -677,7 +677,7 @@
           <a:p>
             <a:fld id="{2ADF637E-82D6-4563-BCF0-C9101F2B5148}" type="datetime1">
               <a:rPr lang="ko-KR" altLang="en-US" smtClean="0"/>
-              <a:t>2026-08-11</a:t>
+              <a:t>2026-08-23</a:t>
             </a:fld>
             <a:endParaRPr lang="ko-KR" altLang="en-US" dirty="0"/>
           </a:p>
@@ -875,7 +875,7 @@
           <a:p>
             <a:fld id="{C9178607-39E6-4CB2-B3CB-AB428B3B6195}" type="datetime1">
               <a:rPr lang="ko-KR" altLang="en-US" smtClean="0"/>
-              <a:t>2026-08-11</a:t>
+              <a:t>2026-08-23</a:t>
             </a:fld>
             <a:endParaRPr lang="ko-KR" altLang="en-US" dirty="0"/>
           </a:p>
@@ -1083,7 +1083,7 @@
           <a:p>
             <a:fld id="{F578A2F2-325F-46A6-8956-F2A49A35BAF8}" type="datetime1">
               <a:rPr lang="ko-KR" altLang="en-US" smtClean="0"/>
-              <a:t>2026-08-11</a:t>
+              <a:t>2026-08-23</a:t>
             </a:fld>
             <a:endParaRPr lang="ko-KR" altLang="en-US" dirty="0"/>
           </a:p>
@@ -1330,7 +1330,7 @@
           <a:p>
             <a:fld id="{D58CD677-7AD2-4A27-94BD-C65458D22428}" type="datetime1">
               <a:rPr lang="ko-KR" altLang="en-US" smtClean="0"/>
-              <a:t>2026-08-11</a:t>
+              <a:t>2026-08-23</a:t>
             </a:fld>
             <a:endParaRPr lang="ko-KR" altLang="en-US" dirty="0"/>
           </a:p>
@@ -1655,7 +1655,7 @@
           <a:p>
             <a:fld id="{2BEF52EC-B397-4D0A-AE91-E0D6840C85A1}" type="datetime1">
               <a:rPr lang="ko-KR" altLang="en-US" smtClean="0"/>
-              <a:t>2026-08-11</a:t>
+              <a:t>2026-08-23</a:t>
             </a:fld>
             <a:endParaRPr lang="ko-KR" altLang="en-US" dirty="0"/>
           </a:p>
@@ -1920,7 +1920,7 @@
           <a:p>
             <a:fld id="{32DD6007-6A42-4C9B-B218-6A32B3A38C67}" type="datetime1">
               <a:rPr lang="ko-KR" altLang="en-US" smtClean="0"/>
-              <a:t>2026-08-11</a:t>
+              <a:t>2026-08-23</a:t>
             </a:fld>
             <a:endParaRPr lang="ko-KR" altLang="en-US" dirty="0"/>
           </a:p>
@@ -2332,7 +2332,7 @@
           <a:p>
             <a:fld id="{F66658DF-8B5F-4351-A42C-BF3495DE7ABE}" type="datetime1">
               <a:rPr lang="ko-KR" altLang="en-US" smtClean="0"/>
-              <a:t>2026-08-11</a:t>
+              <a:t>2026-08-23</a:t>
             </a:fld>
             <a:endParaRPr lang="ko-KR" altLang="en-US" dirty="0"/>
           </a:p>
@@ -2473,7 +2473,7 @@
           <a:p>
             <a:fld id="{74359C48-8150-4FAB-8BEF-6AD61CFC9BBE}" type="datetime1">
               <a:rPr lang="ko-KR" altLang="en-US" smtClean="0"/>
-              <a:t>2026-08-11</a:t>
+              <a:t>2026-08-23</a:t>
             </a:fld>
             <a:endParaRPr lang="ko-KR" altLang="en-US" dirty="0"/>
           </a:p>
@@ -2586,7 +2586,7 @@
           <a:p>
             <a:fld id="{2D41DBCF-1091-470D-AC72-5CF3D00280AC}" type="datetime1">
               <a:rPr lang="ko-KR" altLang="en-US" smtClean="0"/>
-              <a:t>2026-08-11</a:t>
+              <a:t>2026-08-23</a:t>
             </a:fld>
             <a:endParaRPr lang="ko-KR" altLang="en-US" dirty="0"/>
           </a:p>
@@ -2897,7 +2897,7 @@
           <a:p>
             <a:fld id="{4024AE7C-57FB-4DBB-B90C-59145D637BF6}" type="datetime1">
               <a:rPr lang="ko-KR" altLang="en-US" smtClean="0"/>
-              <a:t>2026-08-11</a:t>
+              <a:t>2026-08-23</a:t>
             </a:fld>
             <a:endParaRPr lang="ko-KR" altLang="en-US" dirty="0"/>
           </a:p>
@@ -3185,7 +3185,7 @@
           <a:p>
             <a:fld id="{17D92253-43A0-46E3-918E-3929407A8C01}" type="datetime1">
               <a:rPr lang="ko-KR" altLang="en-US" smtClean="0"/>
-              <a:t>2026-08-11</a:t>
+              <a:t>2026-08-23</a:t>
             </a:fld>
             <a:endParaRPr lang="ko-KR" altLang="en-US" dirty="0"/>
           </a:p>
@@ -3426,7 +3426,7 @@
           <a:p>
             <a:fld id="{75D61A29-800E-482A-B0FD-5A04401ECD92}" type="datetime1">
               <a:rPr lang="ko-KR" altLang="en-US" smtClean="0"/>
-              <a:t>2026-08-11</a:t>
+              <a:t>2026-08-23</a:t>
             </a:fld>
             <a:endParaRPr lang="ko-KR" altLang="en-US" dirty="0"/>
           </a:p>
@@ -4735,7 +4735,7 @@
           <a:lstStyle/>
           <a:p>
             <a:r>
-              <a:rPr dirty="0" err="1"/>
+              <a:rPr lang="ko-KR" altLang="en-US" dirty="0"/>
               <a:t>서명</a:t>
             </a:r>
             <a:r>
@@ -7985,13 +7985,7 @@
                           <a:rPr lang="en-US" i="1">
                             <a:latin typeface="Cambria Math"/>
                           </a:rPr>
-                          <m:t>×</m:t>
-                        </m:r>
-                        <m:r>
-                          <a:rPr lang="en-US" i="1">
-                            <a:latin typeface="Cambria Math"/>
-                          </a:rPr>
-                          <m:t>ℓ</m:t>
+                          <m:t>×ℓ</m:t>
                         </m:r>
                       </m:sup>
                     </m:sSubSup>
@@ -8409,7 +8403,7 @@
           <p:nvPr>
             <p:extLst>
               <p:ext uri="{D42A27DB-BD31-4B8C-83A1-F6EECF244321}">
-                <p14:modId xmlns:p14="http://schemas.microsoft.com/office/powerpoint/2010/main" val="3071520339"/>
+                <p14:modId xmlns:p14="http://schemas.microsoft.com/office/powerpoint/2010/main" val="4175134136"/>
               </p:ext>
             </p:extLst>
           </p:nvPr>
@@ -8616,7 +8610,15 @@
                       <a:pPr algn="ctr"/>
                       <a:r>
                         <a:rPr sz="1800" dirty="0"/>
-                        <a:t>A (∈ Rq, k×ℓ)</a:t>
+                        <a:t>A (∈ R</a:t>
+                      </a:r>
+                      <a:r>
+                        <a:rPr sz="1800" baseline="-25000" dirty="0"/>
+                        <a:t>q</a:t>
+                      </a:r>
+                      <a:r>
+                        <a:rPr sz="1800" dirty="0"/>
+                        <a:t>, k×ℓ)</a:t>
                       </a:r>
                     </a:p>
                   </a:txBody>
@@ -8781,7 +8783,15 @@
                       <a:pPr algn="ctr"/>
                       <a:r>
                         <a:rPr sz="1800" dirty="0"/>
-                        <a:t>t (∈ Rq, k개)</a:t>
+                        <a:t>t (∈ R</a:t>
+                      </a:r>
+                      <a:r>
+                        <a:rPr sz="1800" baseline="-25000" dirty="0"/>
+                        <a:t>q</a:t>
+                      </a:r>
+                      <a:r>
+                        <a:rPr sz="1800" dirty="0"/>
+                        <a:t>, k개)</a:t>
                       </a:r>
                     </a:p>
                   </a:txBody>
@@ -11177,19 +11187,7 @@
                       <a:rPr lang="en-US" i="1">
                         <a:latin typeface="Cambria Math"/>
                       </a:rPr>
-                      <m:t>+</m:t>
-                    </m:r>
-                    <m:r>
-                      <a:rPr lang="en-US" i="1">
-                        <a:latin typeface="Cambria Math"/>
-                      </a:rPr>
-                      <m:t>1</m:t>
-                    </m:r>
-                    <m:r>
-                      <a:rPr lang="en-US" i="1">
-                        <a:latin typeface="Cambria Math"/>
-                      </a:rPr>
-                      <m:t>≤</m:t>
+                      <m:t>+1≤</m:t>
                     </m:r>
                     <m:r>
                       <a:rPr lang="en-US" i="1">
@@ -12386,13 +12384,7 @@
                                   <a:rPr lang="en-US" i="1">
                                     <a:latin typeface="Cambria Math"/>
                                   </a:rPr>
-                                  <m:t>/</m:t>
-                                </m:r>
-                                <m:r>
-                                  <a:rPr lang="en-US" i="1">
-                                    <a:latin typeface="Cambria Math"/>
-                                  </a:rPr>
-                                  <m:t>2</m:t>
+                                  <m:t>/2</m:t>
                                 </m:r>
                               </m:e>
                             </m:mr>
@@ -12446,13 +12438,7 @@
                                   <a:rPr lang="en-US" i="1">
                                     <a:latin typeface="Cambria Math"/>
                                   </a:rPr>
-                                  <m:t>/</m:t>
-                                </m:r>
-                                <m:r>
-                                  <a:rPr lang="en-US" i="1">
-                                    <a:latin typeface="Cambria Math"/>
-                                  </a:rPr>
-                                  <m:t>2</m:t>
+                                  <m:t>/2</m:t>
                                 </m:r>
                               </m:e>
                             </m:mr>
@@ -12615,19 +12601,7 @@
                       <a:rPr lang="en-US" i="1">
                         <a:latin typeface="Cambria Math"/>
                       </a:rPr>
-                      <m:t>/</m:t>
-                    </m:r>
-                    <m:r>
-                      <a:rPr lang="en-US" i="1">
-                        <a:latin typeface="Cambria Math"/>
-                      </a:rPr>
-                      <m:t>2</m:t>
-                    </m:r>
-                    <m:r>
-                      <a:rPr lang="en-US" i="1">
-                        <a:latin typeface="Cambria Math"/>
-                      </a:rPr>
-                      <m:t>≤</m:t>
+                      <m:t>/2≤</m:t>
                     </m:r>
                     <m:r>
                       <a:rPr lang="en-US" i="1">
@@ -12684,13 +12658,7 @@
                       <a:rPr lang="en-US" i="1">
                         <a:latin typeface="Cambria Math"/>
                       </a:rPr>
-                      <m:t>/</m:t>
-                    </m:r>
-                    <m:r>
-                      <a:rPr lang="en-US" i="1">
-                        <a:latin typeface="Cambria Math"/>
-                      </a:rPr>
-                      <m:t>2</m:t>
+                      <m:t>/2</m:t>
                     </m:r>
                   </m:oMath>
                 </a14:m>
@@ -16894,19 +16862,7 @@
                       <a:rPr lang="en-US" i="1">
                         <a:latin typeface="Cambria Math"/>
                       </a:rPr>
-                      <m:t>,</m:t>
-                    </m:r>
-                    <m:r>
-                      <a:rPr lang="en-US" i="1">
-                        <a:latin typeface="Cambria Math"/>
-                      </a:rPr>
-                      <m:t>512</m:t>
-                    </m:r>
-                    <m:r>
-                      <a:rPr lang="en-US" i="1">
-                        <a:latin typeface="Cambria Math"/>
-                      </a:rPr>
-                      <m:t>),</m:t>
+                      <m:t>,512),</m:t>
                     </m:r>
                     <m:sSup>
                       <m:sSupPr>
@@ -16988,19 +16944,7 @@
                       <a:rPr lang="en-US" i="1">
                         <a:latin typeface="Cambria Math"/>
                       </a:rPr>
-                      <m:t>,</m:t>
-                    </m:r>
-                    <m:r>
-                      <a:rPr lang="en-US" i="1">
-                        <a:latin typeface="Cambria Math"/>
-                      </a:rPr>
-                      <m:t>512</m:t>
-                    </m:r>
-                    <m:r>
-                      <a:rPr lang="en-US" i="1">
-                        <a:latin typeface="Cambria Math"/>
-                      </a:rPr>
-                      <m:t>)</m:t>
+                      <m:t>,512)</m:t>
                     </m:r>
                   </m:oMath>
                 </a14:m>
@@ -17280,13 +17224,7 @@
                       <a:rPr lang="en-US" i="1">
                         <a:latin typeface="Cambria Math"/>
                       </a:rPr>
-                      <m:t>,</m:t>
-                    </m:r>
-                    <m:r>
-                      <a:rPr lang="en-US" i="1">
-                        <a:latin typeface="Cambria Math"/>
-                      </a:rPr>
-                      <m:t>2</m:t>
+                      <m:t>,2</m:t>
                     </m:r>
                     <m:sSub>
                       <m:sSubPr>
@@ -17417,13 +17355,7 @@
                       <a:rPr lang="en-US" i="1">
                         <a:latin typeface="Cambria Math"/>
                       </a:rPr>
-                      <m:t>,</m:t>
-                    </m:r>
-                    <m:r>
-                      <a:rPr lang="en-US" i="1">
-                        <a:latin typeface="Cambria Math"/>
-                      </a:rPr>
-                      <m:t>2</m:t>
+                      <m:t>,2</m:t>
                     </m:r>
                     <m:r>
                       <a:rPr lang="en-US" i="1">
@@ -17672,13 +17604,7 @@
                       <a:rPr lang="en-US" i="1">
                         <a:latin typeface="Cambria Math"/>
                       </a:rPr>
-                      <m:t>,</m:t>
-                    </m:r>
-                    <m:r>
-                      <a:rPr lang="en-US" i="1">
-                        <a:latin typeface="Cambria Math"/>
-                      </a:rPr>
-                      <m:t>2</m:t>
+                      <m:t>,2</m:t>
                     </m:r>
                     <m:sSub>
                       <m:sSubPr>
@@ -20038,31 +19964,7 @@
                       <a:rPr lang="en-US" i="1">
                         <a:latin typeface="Cambria Math"/>
                       </a:rPr>
-                      <m:t>=</m:t>
-                    </m:r>
-                    <m:r>
-                      <a:rPr lang="en-US" i="1">
-                        <a:latin typeface="Cambria Math"/>
-                      </a:rPr>
-                      <m:t>16</m:t>
-                    </m:r>
-                    <m:r>
-                      <a:rPr lang="en-US" i="1">
-                        <a:latin typeface="Cambria Math"/>
-                      </a:rPr>
-                      <m:t>,</m:t>
-                    </m:r>
-                    <m:r>
-                      <a:rPr lang="en-US" i="1">
-                        <a:latin typeface="Cambria Math"/>
-                      </a:rPr>
-                      <m:t>417</m:t>
-                    </m:r>
-                    <m:r>
-                      <a:rPr lang="en-US" i="1">
-                        <a:latin typeface="Cambria Math"/>
-                      </a:rPr>
-                      <m:t>,</m:t>
+                      <m:t>=16,417,</m:t>
                     </m:r>
                     <m:r>
                       <a:rPr lang="en-US" i="1">
@@ -20074,19 +19976,7 @@
                       <a:rPr lang="en-US" i="1">
                         <a:latin typeface="Cambria Math"/>
                       </a:rPr>
-                      <m:t>=</m:t>
-                    </m:r>
-                    <m:r>
-                      <a:rPr lang="en-US" i="1">
-                        <a:latin typeface="Cambria Math"/>
-                      </a:rPr>
-                      <m:t>4</m:t>
-                    </m:r>
-                    <m:r>
-                      <a:rPr lang="en-US" i="1">
-                        <a:latin typeface="Cambria Math"/>
-                      </a:rPr>
-                      <m:t>,(</m:t>
+                      <m:t>=4,(</m:t>
                     </m:r>
                     <m:r>
                       <a:rPr lang="en-US" i="1">
@@ -20098,43 +19988,7 @@
                       <a:rPr lang="en-US" i="1">
                         <a:latin typeface="Cambria Math"/>
                       </a:rPr>
-                      <m:t>,</m:t>
-                    </m:r>
-                    <m:r>
-                      <a:rPr lang="en-US" i="1">
-                        <a:latin typeface="Cambria Math"/>
-                      </a:rPr>
-                      <m:t>ℓ</m:t>
-                    </m:r>
-                    <m:r>
-                      <a:rPr lang="en-US" i="1">
-                        <a:latin typeface="Cambria Math"/>
-                      </a:rPr>
-                      <m:t>)=(</m:t>
-                    </m:r>
-                    <m:r>
-                      <a:rPr lang="en-US" i="1">
-                        <a:latin typeface="Cambria Math"/>
-                      </a:rPr>
-                      <m:t>3</m:t>
-                    </m:r>
-                    <m:r>
-                      <a:rPr lang="en-US" i="1">
-                        <a:latin typeface="Cambria Math"/>
-                      </a:rPr>
-                      <m:t>,</m:t>
-                    </m:r>
-                    <m:r>
-                      <a:rPr lang="en-US" i="1">
-                        <a:latin typeface="Cambria Math"/>
-                      </a:rPr>
-                      <m:t>2</m:t>
-                    </m:r>
-                    <m:r>
-                      <a:rPr lang="en-US" i="1">
-                        <a:latin typeface="Cambria Math"/>
-                      </a:rPr>
-                      <m:t>),</m:t>
+                      <m:t>,ℓ)=(3,2),</m:t>
                     </m:r>
                     <m:r>
                       <a:rPr lang="en-US" i="1">
@@ -20146,19 +20000,7 @@
                       <a:rPr lang="en-US" i="1">
                         <a:latin typeface="Cambria Math"/>
                       </a:rPr>
-                      <m:t>=</m:t>
-                    </m:r>
-                    <m:r>
-                      <a:rPr lang="en-US" i="1">
-                        <a:latin typeface="Cambria Math"/>
-                      </a:rPr>
-                      <m:t>10</m:t>
-                    </m:r>
-                    <m:r>
-                      <a:rPr lang="en-US" i="1">
-                        <a:latin typeface="Cambria Math"/>
-                      </a:rPr>
-                      <m:t>,</m:t>
+                      <m:t>=10,</m:t>
                     </m:r>
                     <m:sSub>
                       <m:sSubPr>
@@ -20220,31 +20062,7 @@
                       <a:rPr lang="en-US" i="1">
                         <a:latin typeface="Cambria Math"/>
                       </a:rPr>
-                      <m:t>=</m:t>
-                    </m:r>
-                    <m:r>
-                      <a:rPr lang="en-US" i="1">
-                        <a:latin typeface="Cambria Math"/>
-                      </a:rPr>
-                      <m:t>1</m:t>
-                    </m:r>
-                    <m:r>
-                      <a:rPr lang="en-US" i="1">
-                        <a:latin typeface="Cambria Math"/>
-                      </a:rPr>
-                      <m:t>,</m:t>
-                    </m:r>
-                    <m:r>
-                      <a:rPr lang="en-US" i="1">
-                        <a:latin typeface="Cambria Math"/>
-                      </a:rPr>
-                      <m:t>024</m:t>
-                    </m:r>
-                    <m:r>
-                      <a:rPr lang="en-US" i="1">
-                        <a:latin typeface="Cambria Math"/>
-                      </a:rPr>
-                      <m:t>,</m:t>
+                      <m:t>=1,024,</m:t>
                     </m:r>
                     <m:r>
                       <a:rPr lang="en-US" i="1">
@@ -20256,19 +20074,7 @@
                       <a:rPr lang="en-US" i="1">
                         <a:latin typeface="Cambria Math"/>
                       </a:rPr>
-                      <m:t>=</m:t>
-                    </m:r>
-                    <m:r>
-                      <a:rPr lang="en-US" i="1">
-                        <a:latin typeface="Cambria Math"/>
-                      </a:rPr>
-                      <m:t>4</m:t>
-                    </m:r>
-                    <m:r>
-                      <a:rPr lang="en-US" i="1">
-                        <a:latin typeface="Cambria Math"/>
-                      </a:rPr>
-                      <m:t>,</m:t>
+                      <m:t>=4,</m:t>
                     </m:r>
                     <m:r>
                       <m:rPr>
@@ -20289,13 +20095,7 @@
                       <a:rPr lang="en-US" i="1">
                         <a:latin typeface="Cambria Math"/>
                       </a:rPr>
-                      <m:t>=</m:t>
-                    </m:r>
-                    <m:r>
-                      <a:rPr lang="en-US" i="1">
-                        <a:latin typeface="Cambria Math"/>
-                      </a:rPr>
-                      <m:t>40</m:t>
+                      <m:t>=40</m:t>
                     </m:r>
                   </m:oMath>
                 </a14:m>
@@ -20357,19 +20157,7 @@
                                   <a:rPr lang="en-US" i="1">
                                     <a:latin typeface="Cambria Math"/>
                                   </a:rPr>
-                                  <m:t>15196</m:t>
-                                </m:r>
-                                <m:r>
-                                  <a:rPr lang="en-US" i="1">
-                                    <a:latin typeface="Cambria Math"/>
-                                  </a:rPr>
-                                  <m:t>+</m:t>
-                                </m:r>
-                                <m:r>
-                                  <a:rPr lang="en-US" i="1">
-                                    <a:latin typeface="Cambria Math"/>
-                                  </a:rPr>
-                                  <m:t>7926</m:t>
+                                  <m:t>15196+7926</m:t>
                                 </m:r>
                                 <m:r>
                                   <a:rPr lang="en-US" i="1">
@@ -20381,13 +20169,7 @@
                                   <a:rPr lang="en-US" i="1">
                                     <a:latin typeface="Cambria Math"/>
                                   </a:rPr>
-                                  <m:t>+</m:t>
-                                </m:r>
-                                <m:r>
-                                  <a:rPr lang="en-US" i="1">
-                                    <a:latin typeface="Cambria Math"/>
-                                  </a:rPr>
-                                  <m:t>8057</m:t>
+                                  <m:t>+8057</m:t>
                                 </m:r>
                                 <m:sSup>
                                   <m:sSupPr>
@@ -20418,13 +20200,7 @@
                                   <a:rPr lang="en-US" i="1">
                                     <a:latin typeface="Cambria Math"/>
                                   </a:rPr>
-                                  <m:t>+</m:t>
-                                </m:r>
-                                <m:r>
-                                  <a:rPr lang="en-US" i="1">
-                                    <a:latin typeface="Cambria Math"/>
-                                  </a:rPr>
-                                  <m:t>13612</m:t>
+                                  <m:t>+13612</m:t>
                                 </m:r>
                                 <m:sSup>
                                   <m:sSupPr>
@@ -20457,19 +20233,7 @@
                                   <a:rPr lang="en-US" i="1">
                                     <a:latin typeface="Cambria Math"/>
                                   </a:rPr>
-                                  <m:t>14303</m:t>
-                                </m:r>
-                                <m:r>
-                                  <a:rPr lang="en-US" i="1">
-                                    <a:latin typeface="Cambria Math"/>
-                                  </a:rPr>
-                                  <m:t>+</m:t>
-                                </m:r>
-                                <m:r>
-                                  <a:rPr lang="en-US" i="1">
-                                    <a:latin typeface="Cambria Math"/>
-                                  </a:rPr>
-                                  <m:t>5</m:t>
+                                  <m:t>14303+5</m:t>
                                 </m:r>
                                 <m:r>
                                   <a:rPr lang="en-US" i="1">
@@ -20481,13 +20245,7 @@
                                   <a:rPr lang="en-US" i="1">
                                     <a:latin typeface="Cambria Math"/>
                                   </a:rPr>
-                                  <m:t>+</m:t>
-                                </m:r>
-                                <m:r>
-                                  <a:rPr lang="en-US" i="1">
-                                    <a:latin typeface="Cambria Math"/>
-                                  </a:rPr>
-                                  <m:t>12257</m:t>
+                                  <m:t>+12257</m:t>
                                 </m:r>
                                 <m:sSup>
                                   <m:sSupPr>
@@ -20518,13 +20276,7 @@
                                   <a:rPr lang="en-US" i="1">
                                     <a:latin typeface="Cambria Math"/>
                                   </a:rPr>
-                                  <m:t>+</m:t>
-                                </m:r>
-                                <m:r>
-                                  <a:rPr lang="en-US" i="1">
-                                    <a:latin typeface="Cambria Math"/>
-                                  </a:rPr>
-                                  <m:t>2347</m:t>
+                                  <m:t>+2347</m:t>
                                 </m:r>
                                 <m:sSup>
                                   <m:sSupPr>
@@ -20559,19 +20311,7 @@
                                   <a:rPr lang="en-US" i="1">
                                     <a:latin typeface="Cambria Math"/>
                                   </a:rPr>
-                                  <m:t>9765</m:t>
-                                </m:r>
-                                <m:r>
-                                  <a:rPr lang="en-US" i="1">
-                                    <a:latin typeface="Cambria Math"/>
-                                  </a:rPr>
-                                  <m:t>+</m:t>
-                                </m:r>
-                                <m:r>
-                                  <a:rPr lang="en-US" i="1">
-                                    <a:latin typeface="Cambria Math"/>
-                                  </a:rPr>
-                                  <m:t>10436</m:t>
+                                  <m:t>9765+10436</m:t>
                                 </m:r>
                                 <m:r>
                                   <a:rPr lang="en-US" i="1">
@@ -20583,13 +20323,7 @@
                                   <a:rPr lang="en-US" i="1">
                                     <a:latin typeface="Cambria Math"/>
                                   </a:rPr>
-                                  <m:t>+</m:t>
-                                </m:r>
-                                <m:r>
-                                  <a:rPr lang="en-US" i="1">
-                                    <a:latin typeface="Cambria Math"/>
-                                  </a:rPr>
-                                  <m:t>10983</m:t>
+                                  <m:t>+10983</m:t>
                                 </m:r>
                                 <m:sSup>
                                   <m:sSupPr>
@@ -20620,13 +20354,7 @@
                                   <a:rPr lang="en-US" i="1">
                                     <a:latin typeface="Cambria Math"/>
                                   </a:rPr>
-                                  <m:t>+</m:t>
-                                </m:r>
-                                <m:r>
-                                  <a:rPr lang="en-US" i="1">
-                                    <a:latin typeface="Cambria Math"/>
-                                  </a:rPr>
-                                  <m:t>5860</m:t>
+                                  <m:t>+5860</m:t>
                                 </m:r>
                                 <m:sSup>
                                   <m:sSupPr>
@@ -20659,19 +20387,7 @@
                                   <a:rPr lang="en-US" i="1">
                                     <a:latin typeface="Cambria Math"/>
                                   </a:rPr>
-                                  <m:t>5393</m:t>
-                                </m:r>
-                                <m:r>
-                                  <a:rPr lang="en-US" i="1">
-                                    <a:latin typeface="Cambria Math"/>
-                                  </a:rPr>
-                                  <m:t>+</m:t>
-                                </m:r>
-                                <m:r>
-                                  <a:rPr lang="en-US" i="1">
-                                    <a:latin typeface="Cambria Math"/>
-                                  </a:rPr>
-                                  <m:t>311</m:t>
+                                  <m:t>5393+311</m:t>
                                 </m:r>
                                 <m:r>
                                   <a:rPr lang="en-US" i="1">
@@ -20683,13 +20399,7 @@
                                   <a:rPr lang="en-US" i="1">
                                     <a:latin typeface="Cambria Math"/>
                                   </a:rPr>
-                                  <m:t>+</m:t>
-                                </m:r>
-                                <m:r>
-                                  <a:rPr lang="en-US" i="1">
-                                    <a:latin typeface="Cambria Math"/>
-                                  </a:rPr>
-                                  <m:t>5144</m:t>
+                                  <m:t>+5144</m:t>
                                 </m:r>
                                 <m:sSup>
                                   <m:sSupPr>
@@ -20720,13 +20430,7 @@
                                   <a:rPr lang="en-US" i="1">
                                     <a:latin typeface="Cambria Math"/>
                                   </a:rPr>
-                                  <m:t>+</m:t>
-                                </m:r>
-                                <m:r>
-                                  <a:rPr lang="en-US" i="1">
-                                    <a:latin typeface="Cambria Math"/>
-                                  </a:rPr>
-                                  <m:t>10841</m:t>
+                                  <m:t>+10841</m:t>
                                 </m:r>
                                 <m:sSup>
                                   <m:sSupPr>
@@ -20761,19 +20465,7 @@
                                   <a:rPr lang="en-US" i="1">
                                     <a:latin typeface="Cambria Math"/>
                                   </a:rPr>
-                                  <m:t>11868</m:t>
-                                </m:r>
-                                <m:r>
-                                  <a:rPr lang="en-US" i="1">
-                                    <a:latin typeface="Cambria Math"/>
-                                  </a:rPr>
-                                  <m:t>+</m:t>
-                                </m:r>
-                                <m:r>
-                                  <a:rPr lang="en-US" i="1">
-                                    <a:latin typeface="Cambria Math"/>
-                                  </a:rPr>
-                                  <m:t>7995</m:t>
+                                  <m:t>11868+7995</m:t>
                                 </m:r>
                                 <m:r>
                                   <a:rPr lang="en-US" i="1">
@@ -20785,13 +20477,7 @@
                                   <a:rPr lang="en-US" i="1">
                                     <a:latin typeface="Cambria Math"/>
                                   </a:rPr>
-                                  <m:t>+</m:t>
-                                </m:r>
-                                <m:r>
-                                  <a:rPr lang="en-US" i="1">
-                                    <a:latin typeface="Cambria Math"/>
-                                  </a:rPr>
-                                  <m:t>10716</m:t>
+                                  <m:t>+10716</m:t>
                                 </m:r>
                                 <m:sSup>
                                   <m:sSupPr>
@@ -20822,13 +20508,7 @@
                                   <a:rPr lang="en-US" i="1">
                                     <a:latin typeface="Cambria Math"/>
                                   </a:rPr>
-                                  <m:t>+</m:t>
-                                </m:r>
-                                <m:r>
-                                  <a:rPr lang="en-US" i="1">
-                                    <a:latin typeface="Cambria Math"/>
-                                  </a:rPr>
-                                  <m:t>3121</m:t>
+                                  <m:t>+3121</m:t>
                                 </m:r>
                                 <m:sSup>
                                   <m:sSupPr>
@@ -20861,19 +20541,7 @@
                                   <a:rPr lang="en-US" i="1">
                                     <a:latin typeface="Cambria Math"/>
                                   </a:rPr>
-                                  <m:t>9390</m:t>
-                                </m:r>
-                                <m:r>
-                                  <a:rPr lang="en-US" i="1">
-                                    <a:latin typeface="Cambria Math"/>
-                                  </a:rPr>
-                                  <m:t>+</m:t>
-                                </m:r>
-                                <m:r>
-                                  <a:rPr lang="en-US" i="1">
-                                    <a:latin typeface="Cambria Math"/>
-                                  </a:rPr>
-                                  <m:t>2055</m:t>
+                                  <m:t>9390+2055</m:t>
                                 </m:r>
                                 <m:r>
                                   <a:rPr lang="en-US" i="1">
@@ -20885,13 +20553,7 @@
                                   <a:rPr lang="en-US" i="1">
                                     <a:latin typeface="Cambria Math"/>
                                   </a:rPr>
-                                  <m:t>+</m:t>
-                                </m:r>
-                                <m:r>
-                                  <a:rPr lang="en-US" i="1">
-                                    <a:latin typeface="Cambria Math"/>
-                                  </a:rPr>
-                                  <m:t>6505</m:t>
+                                  <m:t>+6505</m:t>
                                 </m:r>
                                 <m:sSup>
                                   <m:sSupPr>
@@ -20922,13 +20584,7 @@
                                   <a:rPr lang="en-US" i="1">
                                     <a:latin typeface="Cambria Math"/>
                                   </a:rPr>
-                                  <m:t>+</m:t>
-                                </m:r>
-                                <m:r>
-                                  <a:rPr lang="en-US" i="1">
-                                    <a:latin typeface="Cambria Math"/>
-                                  </a:rPr>
-                                  <m:t>2440</m:t>
+                                  <m:t>+2440</m:t>
                                 </m:r>
                                 <m:sSup>
                                   <m:sSupPr>
@@ -21030,19 +20686,7 @@
                                 <a:rPr lang="en-US" i="1">
                                   <a:latin typeface="Cambria Math"/>
                                 </a:rPr>
-                                <m:t>2</m:t>
-                              </m:r>
-                              <m:r>
-                                <a:rPr lang="en-US" i="1">
-                                  <a:latin typeface="Cambria Math"/>
-                                </a:rPr>
-                                <m:t>+</m:t>
-                              </m:r>
-                              <m:r>
-                                <a:rPr lang="en-US" i="1">
-                                  <a:latin typeface="Cambria Math"/>
-                                </a:rPr>
-                                <m:t>5</m:t>
+                                <m:t>2+5</m:t>
                               </m:r>
                               <m:r>
                                 <a:rPr lang="en-US" i="1">
@@ -21054,13 +20698,7 @@
                                 <a:rPr lang="en-US" i="1">
                                   <a:latin typeface="Cambria Math"/>
                                 </a:rPr>
-                                <m:t>−</m:t>
-                              </m:r>
-                              <m:r>
-                                <a:rPr lang="en-US" i="1">
-                                  <a:latin typeface="Cambria Math"/>
-                                </a:rPr>
-                                <m:t>10</m:t>
+                                <m:t>−10</m:t>
                               </m:r>
                               <m:sSup>
                                 <m:sSupPr>
@@ -21091,13 +20729,7 @@
                                 <a:rPr lang="en-US" i="1">
                                   <a:latin typeface="Cambria Math"/>
                                 </a:rPr>
-                                <m:t>−</m:t>
-                              </m:r>
-                              <m:r>
-                                <a:rPr lang="en-US" i="1">
-                                  <a:latin typeface="Cambria Math"/>
-                                </a:rPr>
-                                <m:t>5</m:t>
+                                <m:t>−5</m:t>
                               </m:r>
                               <m:sSup>
                                 <m:sSupPr>
@@ -21130,19 +20762,7 @@
                                 <a:rPr lang="en-US" i="1">
                                   <a:latin typeface="Cambria Math"/>
                                 </a:rPr>
-                                <m:t>2</m:t>
-                              </m:r>
-                              <m:r>
-                                <a:rPr lang="en-US" i="1">
-                                  <a:latin typeface="Cambria Math"/>
-                                </a:rPr>
-                                <m:t>+</m:t>
-                              </m:r>
-                              <m:r>
-                                <a:rPr lang="en-US" i="1">
-                                  <a:latin typeface="Cambria Math"/>
-                                </a:rPr>
-                                <m:t>3</m:t>
+                                <m:t>2+3</m:t>
                               </m:r>
                               <m:r>
                                 <a:rPr lang="en-US" i="1">
@@ -21154,13 +20774,7 @@
                                 <a:rPr lang="en-US" i="1">
                                   <a:latin typeface="Cambria Math"/>
                                 </a:rPr>
-                                <m:t>−</m:t>
-                              </m:r>
-                              <m:r>
-                                <a:rPr lang="en-US" i="1">
-                                  <a:latin typeface="Cambria Math"/>
-                                </a:rPr>
-                                <m:t>4</m:t>
+                                <m:t>−4</m:t>
                               </m:r>
                               <m:sSup>
                                 <m:sSupPr>
@@ -21191,13 +20805,7 @@
                                 <a:rPr lang="en-US" i="1">
                                   <a:latin typeface="Cambria Math"/>
                                 </a:rPr>
-                                <m:t>−</m:t>
-                              </m:r>
-                              <m:r>
-                                <a:rPr lang="en-US" i="1">
-                                  <a:latin typeface="Cambria Math"/>
-                                </a:rPr>
-                                <m:t>4</m:t>
+                                <m:t>−4</m:t>
                               </m:r>
                               <m:sSup>
                                 <m:sSupPr>
@@ -21328,25 +20936,7 @@
                                 <a:rPr lang="en-US" i="1">
                                   <a:latin typeface="Cambria Math"/>
                                 </a:rPr>
-                                <m:t>−</m:t>
-                              </m:r>
-                              <m:r>
-                                <a:rPr lang="en-US" i="1">
-                                  <a:latin typeface="Cambria Math"/>
-                                </a:rPr>
-                                <m:t>8</m:t>
-                              </m:r>
-                              <m:r>
-                                <a:rPr lang="en-US" i="1">
-                                  <a:latin typeface="Cambria Math"/>
-                                </a:rPr>
-                                <m:t>+</m:t>
-                              </m:r>
-                              <m:r>
-                                <a:rPr lang="en-US" i="1">
-                                  <a:latin typeface="Cambria Math"/>
-                                </a:rPr>
-                                <m:t>3</m:t>
+                                <m:t>−8+3</m:t>
                               </m:r>
                               <m:r>
                                 <a:rPr lang="en-US" i="1">
@@ -21358,13 +20948,7 @@
                                 <a:rPr lang="en-US" i="1">
                                   <a:latin typeface="Cambria Math"/>
                                 </a:rPr>
-                                <m:t>+</m:t>
-                              </m:r>
-                              <m:r>
-                                <a:rPr lang="en-US" i="1">
-                                  <a:latin typeface="Cambria Math"/>
-                                </a:rPr>
-                                <m:t>4</m:t>
+                                <m:t>+4</m:t>
                               </m:r>
                               <m:sSup>
                                 <m:sSupPr>
@@ -21395,13 +20979,7 @@
                                 <a:rPr lang="en-US" i="1">
                                   <a:latin typeface="Cambria Math"/>
                                 </a:rPr>
-                                <m:t>+</m:t>
-                              </m:r>
-                              <m:r>
-                                <a:rPr lang="en-US" i="1">
-                                  <a:latin typeface="Cambria Math"/>
-                                </a:rPr>
-                                <m:t>4</m:t>
+                                <m:t>+4</m:t>
                               </m:r>
                               <m:sSup>
                                 <m:sSupPr>
@@ -21434,19 +21012,7 @@
                                 <a:rPr lang="en-US" i="1">
                                   <a:latin typeface="Cambria Math"/>
                                 </a:rPr>
-                                <m:t>8</m:t>
-                              </m:r>
-                              <m:r>
-                                <a:rPr lang="en-US" i="1">
-                                  <a:latin typeface="Cambria Math"/>
-                                </a:rPr>
-                                <m:t>+</m:t>
-                              </m:r>
-                              <m:r>
-                                <a:rPr lang="en-US" i="1">
-                                  <a:latin typeface="Cambria Math"/>
-                                </a:rPr>
-                                <m:t>10</m:t>
+                                <m:t>8+10</m:t>
                               </m:r>
                               <m:r>
                                 <a:rPr lang="en-US" i="1">
@@ -21489,13 +21055,7 @@
                                 <a:rPr lang="en-US" i="1">
                                   <a:latin typeface="Cambria Math"/>
                                 </a:rPr>
-                                <m:t>+</m:t>
-                              </m:r>
-                              <m:r>
-                                <a:rPr lang="en-US" i="1">
-                                  <a:latin typeface="Cambria Math"/>
-                                </a:rPr>
-                                <m:t>8</m:t>
+                                <m:t>+8</m:t>
                               </m:r>
                               <m:sSup>
                                 <m:sSupPr>
@@ -21528,25 +21088,7 @@
                                 <a:rPr lang="en-US" i="1">
                                   <a:latin typeface="Cambria Math"/>
                                 </a:rPr>
-                                <m:t>−</m:t>
-                              </m:r>
-                              <m:r>
-                                <a:rPr lang="en-US" i="1">
-                                  <a:latin typeface="Cambria Math"/>
-                                </a:rPr>
-                                <m:t>3</m:t>
-                              </m:r>
-                              <m:r>
-                                <a:rPr lang="en-US" i="1">
-                                  <a:latin typeface="Cambria Math"/>
-                                </a:rPr>
-                                <m:t>−</m:t>
-                              </m:r>
-                              <m:r>
-                                <a:rPr lang="en-US" i="1">
-                                  <a:latin typeface="Cambria Math"/>
-                                </a:rPr>
-                                <m:t>8</m:t>
+                                <m:t>−3−8</m:t>
                               </m:r>
                               <m:r>
                                 <a:rPr lang="en-US" i="1">
@@ -21558,13 +21100,7 @@
                                 <a:rPr lang="en-US" i="1">
                                   <a:latin typeface="Cambria Math"/>
                                 </a:rPr>
-                                <m:t>+</m:t>
-                              </m:r>
-                              <m:r>
-                                <a:rPr lang="en-US" i="1">
-                                  <a:latin typeface="Cambria Math"/>
-                                </a:rPr>
-                                <m:t>6</m:t>
+                                <m:t>+6</m:t>
                               </m:r>
                               <m:sSup>
                                 <m:sSupPr>
@@ -21595,13 +21131,7 @@
                                 <a:rPr lang="en-US" i="1">
                                   <a:latin typeface="Cambria Math"/>
                                 </a:rPr>
-                                <m:t>+</m:t>
-                              </m:r>
-                              <m:r>
-                                <a:rPr lang="en-US" i="1">
-                                  <a:latin typeface="Cambria Math"/>
-                                </a:rPr>
-                                <m:t>6</m:t>
+                                <m:t>+6</m:t>
                               </m:r>
                               <m:sSup>
                                 <m:sSupPr>
@@ -21823,19 +21353,7 @@
                                 <a:rPr lang="en-US" i="1">
                                   <a:latin typeface="Cambria Math"/>
                                 </a:rPr>
-                                <m:t>5384</m:t>
-                              </m:r>
-                              <m:r>
-                                <a:rPr lang="en-US" i="1">
-                                  <a:latin typeface="Cambria Math"/>
-                                </a:rPr>
-                                <m:t>−</m:t>
-                              </m:r>
-                              <m:r>
-                                <a:rPr lang="en-US" i="1">
-                                  <a:latin typeface="Cambria Math"/>
-                                </a:rPr>
-                                <m:t>8016</m:t>
+                                <m:t>5384−8016</m:t>
                               </m:r>
                               <m:r>
                                 <a:rPr lang="en-US" i="1">
@@ -21847,13 +21365,7 @@
                                 <a:rPr lang="en-US" i="1">
                                   <a:latin typeface="Cambria Math"/>
                                 </a:rPr>
-                                <m:t>−</m:t>
-                              </m:r>
-                              <m:r>
-                                <a:rPr lang="en-US" i="1">
-                                  <a:latin typeface="Cambria Math"/>
-                                </a:rPr>
-                                <m:t>2196</m:t>
+                                <m:t>−2196</m:t>
                               </m:r>
                               <m:sSup>
                                 <m:sSupPr>
@@ -21884,13 +21396,7 @@
                                 <a:rPr lang="en-US" i="1">
                                   <a:latin typeface="Cambria Math"/>
                                 </a:rPr>
-                                <m:t>−</m:t>
-                              </m:r>
-                              <m:r>
-                                <a:rPr lang="en-US" i="1">
-                                  <a:latin typeface="Cambria Math"/>
-                                </a:rPr>
-                                <m:t>4992</m:t>
+                                <m:t>−4992</m:t>
                               </m:r>
                               <m:sSup>
                                 <m:sSupPr>
@@ -21923,19 +21429,7 @@
                                 <a:rPr lang="en-US" i="1">
                                   <a:latin typeface="Cambria Math"/>
                                 </a:rPr>
-                                <m:t>4578</m:t>
-                              </m:r>
-                              <m:r>
-                                <a:rPr lang="en-US" i="1">
-                                  <a:latin typeface="Cambria Math"/>
-                                </a:rPr>
-                                <m:t>+</m:t>
-                              </m:r>
-                              <m:r>
-                                <a:rPr lang="en-US" i="1">
-                                  <a:latin typeface="Cambria Math"/>
-                                </a:rPr>
-                                <m:t>1291</m:t>
+                                <m:t>4578+1291</m:t>
                               </m:r>
                               <m:r>
                                 <a:rPr lang="en-US" i="1">
@@ -21947,13 +21441,7 @@
                                 <a:rPr lang="en-US" i="1">
                                   <a:latin typeface="Cambria Math"/>
                                 </a:rPr>
-                                <m:t>+</m:t>
-                              </m:r>
-                              <m:r>
-                                <a:rPr lang="en-US" i="1">
-                                  <a:latin typeface="Cambria Math"/>
-                                </a:rPr>
-                                <m:t>5976</m:t>
+                                <m:t>+5976</m:t>
                               </m:r>
                               <m:sSup>
                                 <m:sSupPr>
@@ -21984,13 +21472,7 @@
                                 <a:rPr lang="en-US" i="1">
                                   <a:latin typeface="Cambria Math"/>
                                 </a:rPr>
-                                <m:t>−</m:t>
-                              </m:r>
-                              <m:r>
-                                <a:rPr lang="en-US" i="1">
-                                  <a:latin typeface="Cambria Math"/>
-                                </a:rPr>
-                                <m:t>6576</m:t>
+                                <m:t>−6576</m:t>
                               </m:r>
                               <m:sSup>
                                 <m:sSupPr>
@@ -22023,19 +21505,7 @@
                                 <a:rPr lang="en-US" i="1">
                                   <a:latin typeface="Cambria Math"/>
                                 </a:rPr>
-                                <m:t>3959</m:t>
-                              </m:r>
-                              <m:r>
-                                <a:rPr lang="en-US" i="1">
-                                  <a:latin typeface="Cambria Math"/>
-                                </a:rPr>
-                                <m:t>−</m:t>
-                              </m:r>
-                              <m:r>
-                                <a:rPr lang="en-US" i="1">
-                                  <a:latin typeface="Cambria Math"/>
-                                </a:rPr>
-                                <m:t>1666</m:t>
+                                <m:t>3959−1666</m:t>
                               </m:r>
                               <m:r>
                                 <a:rPr lang="en-US" i="1">
@@ -22047,13 +21517,7 @@
                                 <a:rPr lang="en-US" i="1">
                                   <a:latin typeface="Cambria Math"/>
                                 </a:rPr>
-                                <m:t>−</m:t>
-                              </m:r>
-                              <m:r>
-                                <a:rPr lang="en-US" i="1">
-                                  <a:latin typeface="Cambria Math"/>
-                                </a:rPr>
-                                <m:t>1036</m:t>
+                                <m:t>−1036</m:t>
                               </m:r>
                               <m:sSup>
                                 <m:sSupPr>
@@ -22084,13 +21548,7 @@
                                 <a:rPr lang="en-US" i="1">
                                   <a:latin typeface="Cambria Math"/>
                                 </a:rPr>
-                                <m:t>−</m:t>
-                              </m:r>
-                              <m:r>
-                                <a:rPr lang="en-US" i="1">
-                                  <a:latin typeface="Cambria Math"/>
-                                </a:rPr>
-                                <m:t>2345</m:t>
+                                <m:t>−2345</m:t>
                               </m:r>
                               <m:sSup>
                                 <m:sSupPr>
@@ -27802,19 +27260,7 @@
                       <a:rPr lang="en-US" i="1">
                         <a:latin typeface="Cambria Math"/>
                       </a:rPr>
-                      <m:t>,</m:t>
-                    </m:r>
-                    <m:r>
-                      <a:rPr lang="en-US" i="1">
-                        <a:latin typeface="Cambria Math"/>
-                      </a:rPr>
-                      <m:t>ℓ</m:t>
-                    </m:r>
-                    <m:r>
-                      <a:rPr lang="en-US" i="1">
-                        <a:latin typeface="Cambria Math"/>
-                      </a:rPr>
-                      <m:t>)</m:t>
+                      <m:t>,ℓ)</m:t>
                     </m:r>
                   </m:oMath>
                 </a14:m>
@@ -27834,13 +27280,7 @@
                       <a:rPr lang="en-US" i="1">
                         <a:latin typeface="Cambria Math"/>
                       </a:rPr>
-                      <m:t>&gt;</m:t>
-                    </m:r>
-                    <m:r>
-                      <a:rPr lang="en-US" i="1">
-                        <a:latin typeface="Cambria Math"/>
-                      </a:rPr>
-                      <m:t>ℓ</m:t>
+                      <m:t>&gt;ℓ</m:t>
                     </m:r>
                   </m:oMath>
                 </a14:m>
@@ -27937,13 +27377,7 @@
                       <a:rPr lang="en-US" i="1">
                         <a:latin typeface="Cambria Math"/>
                       </a:rPr>
-                      <m:t>±</m:t>
-                    </m:r>
-                    <m:r>
-                      <a:rPr lang="en-US" i="1">
-                        <a:latin typeface="Cambria Math"/>
-                      </a:rPr>
-                      <m:t>1</m:t>
+                      <m:t>±1</m:t>
                     </m:r>
                   </m:oMath>
                 </a14:m>
